--- a/Topic_E/Exam_Practice/TE-L06_Writing_Workshop_Faith_Celebrations_and_Special_Occasions.pptx
+++ b/Topic_E/Exam_Practice/TE-L06_Writing_Workshop_Faith_Celebrations_and_Special_Occasions.pptx
@@ -784,7 +784,11 @@
           <a:lstStyle/>
           <a:p>
             <a:r>
-              <a:rPr lang="en-US" dirty="0"/>
+              <a:rPr lang="ar-SA" dirty="0">
+                <a:latin typeface="Amiri" pitchFamily="2" charset="-78"/>
+                <a:ea typeface="Amiri" pitchFamily="2" charset="-78"/>
+                <a:cs typeface="Amiri" pitchFamily="2" charset="-78"/>
+              </a:rPr>
               <a:t>Q3 (3 min to choose and read). Title (أ) suits Core and Develop; title (ب) suits Stretch.</a:t>
             </a:r>
             <a:endParaRPr lang="en-US" dirty="0"/>
@@ -1403,7 +1407,11 @@
           <a:lstStyle/>
           <a:p>
             <a:r>
-              <a:rPr lang="en-US" dirty="0"/>
+              <a:rPr lang="ar-SA" dirty="0">
+                <a:latin typeface="Amiri" pitchFamily="2" charset="-78"/>
+                <a:ea typeface="Amiri" pitchFamily="2" charset="-78"/>
+                <a:cs typeface="Amiri" pitchFamily="2" charset="-78"/>
+              </a:rPr>
               <a:t>WELCOME (1 min) — while students join.
 • Greet each student by name as they arrive: السَّلَامُ عَلَيْكُمْ. Take the register (Pastoral Tracker: attendance 0/1).
 • 2-MINUTE CHECK-IN (SEND training): a private chat to any student who seemed unsettled last lesson — “Are you okay today? 👍 / 👎”.
@@ -1672,7 +1680,11 @@
           <a:lstStyle/>
           <a:p>
             <a:r>
-              <a:rPr lang="en-US" dirty="0"/>
+              <a:rPr lang="ar-SA" dirty="0">
+                <a:latin typeface="Amiri" pitchFamily="2" charset="-78"/>
+                <a:ea typeface="Amiri" pitchFamily="2" charset="-78"/>
+                <a:cs typeface="Amiri" pitchFamily="2" charset="-78"/>
+              </a:rPr>
               <a:t>QUESTION 1 — FORM FILLING. About 8 minutes. Core: boxes 1–6. Develop / Stretch: all 8. Boxes 3–4 headings use relative-free clauses with feminine verbs (tuḥḍirīnahā) — a boy reads تُحْضِرُهَا / تُشَارِكُ. Box 8: ahdaytuhā (object pronoun).</a:t>
             </a:r>
             <a:endParaRPr lang="en-US" dirty="0"/>
@@ -1936,7 +1948,11 @@
           <a:lstStyle/>
           <a:p>
             <a:r>
-              <a:rPr lang="en-US" dirty="0"/>
+              <a:rPr lang="ar-SA" dirty="0">
+                <a:latin typeface="Amiri" pitchFamily="2" charset="-78"/>
+                <a:ea typeface="Amiri" pitchFamily="2" charset="-78"/>
+                <a:cs typeface="Amiri" pitchFamily="2" charset="-78"/>
+              </a:rPr>
               <a:t>Question words: اسْتَعْدَدْتِ (you prepared — PAST) · بِالتَّرْتِيبِ (in order) · سَتَفْعَلِينَ (you will do — FUTURE) · اسْأَلِي (ask!).</a:t>
             </a:r>
             <a:endParaRPr lang="en-US" dirty="0"/>
@@ -2508,6 +2524,7 @@
                   <a:srgbClr val="D4AF37"/>
                 </a:solidFill>
                 <a:latin typeface="Amiri" pitchFamily="2" charset="-78"/>
+                <a:ea typeface="Amiri" pitchFamily="2" charset="-78"/>
                 <a:cs typeface="Amiri" pitchFamily="2" charset="-78"/>
               </a:rPr>
               <a:t>م</a:t>
@@ -2714,6 +2731,7 @@
                   <a:srgbClr val="D4AF37"/>
                 </a:solidFill>
                 <a:latin typeface="Amiri" pitchFamily="2" charset="-78"/>
+                <a:ea typeface="Amiri" pitchFamily="2" charset="-78"/>
                 <a:cs typeface="Amiri" pitchFamily="2" charset="-78"/>
               </a:rPr>
               <a:t>وَرْشَةُ الكِتَابَةِ — الأَعْيَادُ الدِّينِيَّةُ وَالمُنَاسَبَاتُ</a:t>
@@ -3171,6 +3189,7 @@
                   <a:srgbClr val="D4AF37"/>
                 </a:solidFill>
                 <a:latin typeface="Amiri" pitchFamily="2" charset="-78"/>
+                <a:ea typeface="Amiri" pitchFamily="2" charset="-78"/>
                 <a:cs typeface="Amiri" pitchFamily="2" charset="-78"/>
               </a:rPr>
               <a:t>م</a:t>
@@ -3491,6 +3510,7 @@
                   <a:srgbClr val="8A6D1E"/>
                 </a:solidFill>
                 <a:latin typeface="Amiri" pitchFamily="2" charset="-78"/>
+                <a:ea typeface="Amiri" pitchFamily="2" charset="-78"/>
                 <a:cs typeface="Amiri" pitchFamily="2" charset="-78"/>
               </a:rPr>
               <a:t>نَمُوذَجُ الإِجَابَةِ</a:t>
@@ -3604,6 +3624,7 @@
                   <a:srgbClr val="1F2A37"/>
                 </a:solidFill>
                 <a:latin typeface="Amiri" pitchFamily="2" charset="-78"/>
+                <a:ea typeface="Amiri" pitchFamily="2" charset="-78"/>
                 <a:cs typeface="Amiri" pitchFamily="2" charset="-78"/>
               </a:rPr>
               <a:t>مَرْحَبًا يَا رِيمُ،</a:t>
@@ -3623,6 +3644,7 @@
                   <a:srgbClr val="1F2A37"/>
                 </a:solidFill>
                 <a:latin typeface="Amiri" pitchFamily="2" charset="-78"/>
+                <a:ea typeface="Amiri" pitchFamily="2" charset="-78"/>
                 <a:cs typeface="Amiri" pitchFamily="2" charset="-78"/>
               </a:rPr>
               <a:t>كَيْفَ حَالُكِ؟ عِيدٌ مُبَارَكٌ! أُرِيدُ أَنْ أُخْبِرَكِ عَنْ عِيدِ الفِطْرِ. قَبْلَ العِيدِ اشْتَرَيْتُ فُسْتَانًا أَزْرَقَ جَمِيلًا، وَلَبِسْتُهُ صَبَاحَ العِيدِ. أَوَّلًا، صَلَّيْنَا صَلَاةَ العِيدِ فِي الحَدِيقَةِ الكَبِيرَةِ. ثُمَّ ذَهَبْنَا إِلَى بَيْتِ جَدَّتِي، وَأَكَلْنَا الكَعْكَ هُنَاكَ. بَعْدَ ذٰلِكَ زُرْنَا خَالَاتِي، وَأَعْطَيْنَنِي عِيدِيَّةً. كَانَ اليَوْمُ رَائِعًا، لِأَنَّ كُلَّ العَائِلَةِ كَانَتْ مَعًا. فِي العِيدِ القَادِمِ سَأَطْبُخُ المَعْمُولَ مَعَ أُمِّي. وَأَنْتِ، كَيْفَ احْتَفَلْتِ بِالعِيدِ؟</a:t>
@@ -3642,6 +3664,7 @@
                   <a:srgbClr val="1F2A37"/>
                 </a:solidFill>
                 <a:latin typeface="Amiri" pitchFamily="2" charset="-78"/>
+                <a:ea typeface="Amiri" pitchFamily="2" charset="-78"/>
                 <a:cs typeface="Amiri" pitchFamily="2" charset="-78"/>
               </a:rPr>
               <a:t>مَعَ السَّلَامَةِ،</a:t>
@@ -3661,6 +3684,7 @@
                   <a:srgbClr val="1F2A37"/>
                 </a:solidFill>
                 <a:latin typeface="Amiri" pitchFamily="2" charset="-78"/>
+                <a:ea typeface="Amiri" pitchFamily="2" charset="-78"/>
                 <a:cs typeface="Amiri" pitchFamily="2" charset="-78"/>
               </a:rPr>
               <a:t>زَيْنَبُ</a:t>
@@ -3824,11 +3848,12 @@
               <a:buNone/>
             </a:pPr>
             <a:r>
-              <a:rPr lang="en-US" sz="950" b="1" dirty="0">
+              <a:rPr lang="ar-SA" sz="950" b="1" dirty="0">
                 <a:solidFill>
                   <a:srgbClr val="FFFFFF"/>
                 </a:solidFill>
                 <a:latin typeface="Calibri" pitchFamily="34" charset="0"/>
+                <a:ea typeface="Amiri" pitchFamily="2" charset="-78"/>
                 <a:cs typeface="Amiri" pitchFamily="2" charset="-78"/>
               </a:rPr>
               <a:t>وَلَبِسْتُهُ</a:t>
@@ -3889,11 +3914,12 @@
               <a:buNone/>
             </a:pPr>
             <a:r>
-              <a:rPr lang="en-US" sz="950" b="1" dirty="0">
+              <a:rPr lang="ar-SA" sz="950" b="1" dirty="0">
                 <a:solidFill>
                   <a:srgbClr val="FFFFFF"/>
                 </a:solidFill>
                 <a:latin typeface="Calibri" pitchFamily="34" charset="0"/>
+                <a:ea typeface="Amiri" pitchFamily="2" charset="-78"/>
                 <a:cs typeface="Amiri" pitchFamily="2" charset="-78"/>
               </a:rPr>
               <a:t>أَوَّلًا … ثُمَّ</a:t>
@@ -3954,11 +3980,12 @@
               <a:buNone/>
             </a:pPr>
             <a:r>
-              <a:rPr lang="en-US" sz="950" b="1" dirty="0">
+              <a:rPr lang="ar-SA" sz="950" b="1" dirty="0">
                 <a:solidFill>
                   <a:srgbClr val="FFFFFF"/>
                 </a:solidFill>
                 <a:latin typeface="Calibri" pitchFamily="34" charset="0"/>
+                <a:ea typeface="Amiri" pitchFamily="2" charset="-78"/>
                 <a:cs typeface="Amiri" pitchFamily="2" charset="-78"/>
               </a:rPr>
               <a:t>بَعْدَ ذٰلِكَ</a:t>
@@ -4019,11 +4046,12 @@
               <a:buNone/>
             </a:pPr>
             <a:r>
-              <a:rPr lang="en-US" sz="950" b="1" dirty="0">
+              <a:rPr lang="ar-SA" sz="950" b="1" dirty="0">
                 <a:solidFill>
                   <a:srgbClr val="FFFFFF"/>
                 </a:solidFill>
                 <a:latin typeface="Calibri" pitchFamily="34" charset="0"/>
+                <a:ea typeface="Amiri" pitchFamily="2" charset="-78"/>
                 <a:cs typeface="Amiri" pitchFamily="2" charset="-78"/>
               </a:rPr>
               <a:t>سَأَطْبُخُ المَعْمُولَ</a:t>
@@ -4157,6 +4185,7 @@
                   <a:srgbClr val="D4AF37"/>
                 </a:solidFill>
                 <a:latin typeface="Amiri" pitchFamily="2" charset="-78"/>
+                <a:ea typeface="Amiri" pitchFamily="2" charset="-78"/>
                 <a:cs typeface="Amiri" pitchFamily="2" charset="-78"/>
               </a:rPr>
               <a:t>م</a:t>
@@ -4477,6 +4506,7 @@
                   <a:srgbClr val="8A6D1E"/>
                 </a:solidFill>
                 <a:latin typeface="Amiri" pitchFamily="2" charset="-78"/>
+                <a:ea typeface="Amiri" pitchFamily="2" charset="-78"/>
                 <a:cs typeface="Amiri" pitchFamily="2" charset="-78"/>
               </a:rPr>
               <a:t>نَمُوذَجُ الإِجَابَةِ</a:t>
@@ -4590,6 +4620,7 @@
                   <a:srgbClr val="1F2A37"/>
                 </a:solidFill>
                 <a:latin typeface="Amiri" pitchFamily="2" charset="-78"/>
+                <a:ea typeface="Amiri" pitchFamily="2" charset="-78"/>
                 <a:cs typeface="Amiri" pitchFamily="2" charset="-78"/>
               </a:rPr>
               <a:t>عَزِيزَتِي رِيمُ،</a:t>
@@ -4609,6 +4640,7 @@
                   <a:srgbClr val="1F2A37"/>
                 </a:solidFill>
                 <a:latin typeface="Amiri" pitchFamily="2" charset="-78"/>
+                <a:ea typeface="Amiri" pitchFamily="2" charset="-78"/>
                 <a:cs typeface="Amiri" pitchFamily="2" charset="-78"/>
               </a:rPr>
               <a:t>كُلُّ عَامٍ وَأَنْتِ بِخَيْرٍ! مَا زِلْتُ أَعِيشُ فَرْحَةَ العِيدِ، فَأَرَدْتُ أَنْ أُشَارِكَكِ تَفَاصِيلَهُ. فِي اللَّيْلَةِ الأَخِيرَةِ مِنْ رَمَضَانَ، خَبَزْنَا الكَعْكَ فِي مَطْبَخِ جَدَّتِي حَتَّى مُنْتَصَفِ اللَّيْلِ، ثُمَّ وَزَّعْنَاهُ عَلَى الجِيرَانِ صَبَاحًا. وَبَعْدَ أَنْ صَلَّيْنَا العِيدَ فِي الحَدِيقَةِ مَعَ آلَافِ النَّاسِ، اجْتَمَعَتِ العَائِلَةُ كُلُّهَا عَلَى الفُطُورِ. أَمَّا أَجْمَلُ هَدِيَّةٍ فَكَانَتْ أُسْوِرَةً فِضِّيَّةً أَهْدَتْنِي إِيَّاهَا خَالَتِي، وَلَمْ أَخْلَعْهَا مُنْذُ ذٰلِكَ اليَوْمِ. صَحِيحٌ أَنَّنِي تَعِبْتُ مِنْ كَثْرَةِ الزِّيَارَاتِ، غَيْرَ أَنَّ ضَحِكَاتِ الأَطْفَالِ أَنْسَتْنِي التَّعَبَ. وَإِذَا سَمَحَتْ أُمُّكِ، فَسَأَدْعُوكِ إِلَى إِفْطَارِ رَمَضَانَ القَادِمِ. هَلْ تَقْبَلِينَ؟</a:t>
@@ -4628,6 +4660,7 @@
                   <a:srgbClr val="1F2A37"/>
                 </a:solidFill>
                 <a:latin typeface="Amiri" pitchFamily="2" charset="-78"/>
+                <a:ea typeface="Amiri" pitchFamily="2" charset="-78"/>
                 <a:cs typeface="Amiri" pitchFamily="2" charset="-78"/>
               </a:rPr>
               <a:t>بِمَحَبَّةٍ،</a:t>
@@ -4647,6 +4680,7 @@
                   <a:srgbClr val="1F2A37"/>
                 </a:solidFill>
                 <a:latin typeface="Amiri" pitchFamily="2" charset="-78"/>
+                <a:ea typeface="Amiri" pitchFamily="2" charset="-78"/>
                 <a:cs typeface="Amiri" pitchFamily="2" charset="-78"/>
               </a:rPr>
               <a:t>زَيْنَبُ</a:t>
@@ -4810,11 +4844,12 @@
               <a:buNone/>
             </a:pPr>
             <a:r>
-              <a:rPr lang="en-US" sz="950" b="1" dirty="0">
+              <a:rPr lang="ar-SA" sz="950" b="1" dirty="0">
                 <a:solidFill>
                   <a:srgbClr val="FFFFFF"/>
                 </a:solidFill>
                 <a:latin typeface="Calibri" pitchFamily="34" charset="0"/>
+                <a:ea typeface="Amiri" pitchFamily="2" charset="-78"/>
                 <a:cs typeface="Amiri" pitchFamily="2" charset="-78"/>
               </a:rPr>
               <a:t>مَا زِلْتُ أَعِيشُ</a:t>
@@ -4875,11 +4910,12 @@
               <a:buNone/>
             </a:pPr>
             <a:r>
-              <a:rPr lang="en-US" sz="950" b="1" dirty="0">
+              <a:rPr lang="ar-SA" sz="950" b="1" dirty="0">
                 <a:solidFill>
                   <a:srgbClr val="FFFFFF"/>
                 </a:solidFill>
                 <a:latin typeface="Calibri" pitchFamily="34" charset="0"/>
+                <a:ea typeface="Amiri" pitchFamily="2" charset="-78"/>
                 <a:cs typeface="Amiri" pitchFamily="2" charset="-78"/>
               </a:rPr>
               <a:t>وَزَّعْنَاهُ</a:t>
@@ -4940,11 +4976,12 @@
               <a:buNone/>
             </a:pPr>
             <a:r>
-              <a:rPr lang="en-US" sz="950" b="1" dirty="0">
+              <a:rPr lang="ar-SA" sz="950" b="1" dirty="0">
                 <a:solidFill>
                   <a:srgbClr val="FFFFFF"/>
                 </a:solidFill>
                 <a:latin typeface="Calibri" pitchFamily="34" charset="0"/>
+                <a:ea typeface="Amiri" pitchFamily="2" charset="-78"/>
                 <a:cs typeface="Amiri" pitchFamily="2" charset="-78"/>
               </a:rPr>
               <a:t>أَهْدَتْنِي إِيَّاهَا</a:t>
@@ -5005,11 +5042,12 @@
               <a:buNone/>
             </a:pPr>
             <a:r>
-              <a:rPr lang="en-US" sz="950" b="1" dirty="0">
+              <a:rPr lang="ar-SA" sz="950" b="1" dirty="0">
                 <a:solidFill>
                   <a:srgbClr val="FFFFFF"/>
                 </a:solidFill>
                 <a:latin typeface="Calibri" pitchFamily="34" charset="0"/>
+                <a:ea typeface="Amiri" pitchFamily="2" charset="-78"/>
                 <a:cs typeface="Amiri" pitchFamily="2" charset="-78"/>
               </a:rPr>
               <a:t>أَنْسَتْنِي التَّعَبَ</a:t>
@@ -5143,6 +5181,7 @@
                   <a:srgbClr val="D4AF37"/>
                 </a:solidFill>
                 <a:latin typeface="Amiri" pitchFamily="2" charset="-78"/>
+                <a:ea typeface="Amiri" pitchFamily="2" charset="-78"/>
                 <a:cs typeface="Amiri" pitchFamily="2" charset="-78"/>
               </a:rPr>
               <a:t>م</a:t>
@@ -5463,6 +5502,7 @@
                   <a:srgbClr val="8A6D1E"/>
                 </a:solidFill>
                 <a:latin typeface="Amiri" pitchFamily="2" charset="-78"/>
+                <a:ea typeface="Amiri" pitchFamily="2" charset="-78"/>
                 <a:cs typeface="Amiri" pitchFamily="2" charset="-78"/>
               </a:rPr>
               <a:t>اخْتَرْ عُنْوَانًا وَاحِدًا</a:t>
@@ -5743,6 +5783,7 @@
                   <a:srgbClr val="1B3B6F"/>
                 </a:solidFill>
                 <a:latin typeface="Amiri" pitchFamily="2" charset="-78"/>
+                <a:ea typeface="Amiri" pitchFamily="2" charset="-78"/>
                 <a:cs typeface="Amiri" pitchFamily="2" charset="-78"/>
               </a:rPr>
               <a:t>عِيدٌ لَا أَنْسَاهُ</a:t>
@@ -5781,6 +5822,7 @@
                   <a:srgbClr val="1B3B6F"/>
                 </a:solidFill>
                 <a:latin typeface="Amiri" pitchFamily="2" charset="-78"/>
+                <a:ea typeface="Amiri" pitchFamily="2" charset="-78"/>
                 <a:cs typeface="Amiri" pitchFamily="2" charset="-78"/>
               </a:rPr>
               <a:t>(أ)</a:t>
@@ -5887,6 +5929,7 @@
                   <a:srgbClr val="1B3B6F"/>
                 </a:solidFill>
                 <a:latin typeface="Amiri" pitchFamily="2" charset="-78"/>
+                <a:ea typeface="Amiri" pitchFamily="2" charset="-78"/>
                 <a:cs typeface="Amiri" pitchFamily="2" charset="-78"/>
               </a:rPr>
               <a:t>أَيُّ عِيدٍ وَلِمَاذَا كَانَ مُمَيَّزًا · التَّحْضِيرُ · يَوْمُ العِيدِ بِالتَّرْتِيبِ · مَشَاعِرُكَ وَخُطَطُكَ لِلْعِيدِ القَادِمِ</a:t>
@@ -6018,6 +6061,7 @@
                   <a:srgbClr val="1B3B6F"/>
                 </a:solidFill>
                 <a:latin typeface="Amiri" pitchFamily="2" charset="-78"/>
+                <a:ea typeface="Amiri" pitchFamily="2" charset="-78"/>
                 <a:cs typeface="Amiri" pitchFamily="2" charset="-78"/>
               </a:rPr>
               <a:t>هَلْ فَقَدَتِ الأَعْيَادُ مَعْنَاهَا الحَقِيقِيَّ؟</a:t>
@@ -6056,6 +6100,7 @@
                   <a:srgbClr val="1B3B6F"/>
                 </a:solidFill>
                 <a:latin typeface="Amiri" pitchFamily="2" charset="-78"/>
+                <a:ea typeface="Amiri" pitchFamily="2" charset="-78"/>
                 <a:cs typeface="Amiri" pitchFamily="2" charset="-78"/>
               </a:rPr>
               <a:t>(ب)</a:t>
@@ -6159,6 +6204,7 @@
                   <a:srgbClr val="1B3B6F"/>
                 </a:solidFill>
                 <a:latin typeface="Amiri" pitchFamily="2" charset="-78"/>
+                <a:ea typeface="Amiri" pitchFamily="2" charset="-78"/>
                 <a:cs typeface="Amiri" pitchFamily="2" charset="-78"/>
               </a:rPr>
               <a:t>المَوْضُوعُ · الجَانِبُ التِّجَارِيُّ وَجَوْهَرُ العِيدِ · مِثَالٌ مِنْ تَجْرِبَتِكَ · رَأْيُكَ</a:t>
@@ -6358,6 +6404,7 @@
                   <a:srgbClr val="D4AF37"/>
                 </a:solidFill>
                 <a:latin typeface="Amiri" pitchFamily="2" charset="-78"/>
+                <a:ea typeface="Amiri" pitchFamily="2" charset="-78"/>
                 <a:cs typeface="Amiri" pitchFamily="2" charset="-78"/>
               </a:rPr>
               <a:t>م</a:t>
@@ -6678,6 +6725,7 @@
                   <a:srgbClr val="8A6D1E"/>
                 </a:solidFill>
                 <a:latin typeface="Amiri" pitchFamily="2" charset="-78"/>
+                <a:ea typeface="Amiri" pitchFamily="2" charset="-78"/>
                 <a:cs typeface="Amiri" pitchFamily="2" charset="-78"/>
               </a:rPr>
               <a:t>خُطَّةُ الكِتَابَةِ</a:t>
@@ -7302,6 +7350,7 @@
                   <a:srgbClr val="1B3B6F"/>
                 </a:solidFill>
                 <a:latin typeface="Amiri" pitchFamily="2" charset="-78"/>
+                <a:ea typeface="Amiri" pitchFamily="2" charset="-78"/>
                 <a:cs typeface="Amiri" pitchFamily="2" charset="-78"/>
               </a:rPr>
               <a:t>خَبَزْنَا الكَعْكَ، وَوَزَّعْنَاهُ عَلَى الجِيرَانِ.</a:t>
@@ -7401,6 +7450,7 @@
                   <a:srgbClr val="1B3B6F"/>
                 </a:solidFill>
                 <a:latin typeface="Amiri" pitchFamily="2" charset="-78"/>
+                <a:ea typeface="Amiri" pitchFamily="2" charset="-78"/>
                 <a:cs typeface="Amiri" pitchFamily="2" charset="-78"/>
               </a:rPr>
               <a:t>فِي كُلِّ عِيدٍ نَحْتَفِلُ مَعًا.</a:t>
@@ -7500,6 +7550,7 @@
                   <a:srgbClr val="1B3B6F"/>
                 </a:solidFill>
                 <a:latin typeface="Amiri" pitchFamily="2" charset="-78"/>
+                <a:ea typeface="Amiri" pitchFamily="2" charset="-78"/>
                 <a:cs typeface="Amiri" pitchFamily="2" charset="-78"/>
               </a:rPr>
               <a:t>سَنُسَافِرُ لِنَزُورَهَا هُنَاكَ.</a:t>
@@ -7661,6 +7712,7 @@
                   <a:srgbClr val="1F2A37"/>
                 </a:solidFill>
                 <a:latin typeface="Amiri" pitchFamily="2" charset="-78"/>
+                <a:ea typeface="Amiri" pitchFamily="2" charset="-78"/>
                 <a:cs typeface="Amiri" pitchFamily="2" charset="-78"/>
               </a:rPr>
               <a:t>أ</a:t>
@@ -7687,6 +7739,7 @@
                   <a:srgbClr val="1F2A37"/>
                 </a:solidFill>
                 <a:latin typeface="Amiri" pitchFamily="2" charset="-78"/>
+                <a:ea typeface="Amiri" pitchFamily="2" charset="-78"/>
                 <a:cs typeface="Amiri" pitchFamily="2" charset="-78"/>
               </a:rPr>
               <a:t>ب</a:t>
@@ -7833,6 +7886,7 @@
                   <a:srgbClr val="D4AF37"/>
                 </a:solidFill>
                 <a:latin typeface="Amiri" pitchFamily="2" charset="-78"/>
+                <a:ea typeface="Amiri" pitchFamily="2" charset="-78"/>
                 <a:cs typeface="Amiri" pitchFamily="2" charset="-78"/>
               </a:rPr>
               <a:t>م</a:t>
@@ -8090,6 +8144,7 @@
                   <a:srgbClr val="8A6D1E"/>
                 </a:solidFill>
                 <a:latin typeface="Amiri" pitchFamily="2" charset="-78"/>
+                <a:ea typeface="Amiri" pitchFamily="2" charset="-78"/>
                 <a:cs typeface="Amiri" pitchFamily="2" charset="-78"/>
               </a:rPr>
               <a:t>أ</a:t>
@@ -8154,6 +8209,7 @@
                   <a:srgbClr val="1B3B6F"/>
                 </a:solidFill>
                 <a:latin typeface="Amiri" pitchFamily="2" charset="-78"/>
+                <a:ea typeface="Amiri" pitchFamily="2" charset="-78"/>
                 <a:cs typeface="Amiri" pitchFamily="2" charset="-78"/>
               </a:rPr>
               <a:t>أ</a:t>
@@ -8205,6 +8261,7 @@
                   <a:srgbClr val="8A6D1E"/>
                 </a:solidFill>
                 <a:latin typeface="Amiri" pitchFamily="2" charset="-78"/>
+                <a:ea typeface="Amiri" pitchFamily="2" charset="-78"/>
                 <a:cs typeface="Amiri" pitchFamily="2" charset="-78"/>
               </a:rPr>
               <a:t>نَمُوذَجُ الإِجَابَةِ</a:t>
@@ -8318,6 +8375,7 @@
                   <a:srgbClr val="1F2A37"/>
                 </a:solidFill>
                 <a:latin typeface="Amiri" pitchFamily="2" charset="-78"/>
+                <a:ea typeface="Amiri" pitchFamily="2" charset="-78"/>
                 <a:cs typeface="Amiri" pitchFamily="2" charset="-78"/>
               </a:rPr>
               <a:t>أَجْمَلُ عِيدٍ فِي حَيَاتِي كَانَ عِيدَ الفِطْرِ فِي السَّنَةِ المَاضِيَةِ. فِي ذٰلِكَ العِيدِ زَارَتْنَا جَدَّتِي مِنَ الأُرْدُنِّ لِأَوَّلِ مَرَّةٍ مُنْذُ خَمْسِ سَنَوَاتٍ.</a:t>
@@ -8337,6 +8395,7 @@
                   <a:srgbClr val="1F2A37"/>
                 </a:solidFill>
                 <a:latin typeface="Amiri" pitchFamily="2" charset="-78"/>
+                <a:ea typeface="Amiri" pitchFamily="2" charset="-78"/>
                 <a:cs typeface="Amiri" pitchFamily="2" charset="-78"/>
               </a:rPr>
               <a:t>قَبْلَ العِيدِ صُمْتُ رَمَضَانَ كُلَّهُ، وَكُنْتُ أُسَاعِدُ أُمِّي فِي تَحْضِيرِ الإِفْطَارِ كُلَّ يَوْمٍ. فِي اللَّيْلَةِ الأَخِيرَةِ خَبَزْنَا الكَعْكَ مَعَ جَدَّتِي، وَعَلَّمَتْنِي وَصْفَتَهَا القَدِيمَةَ.</a:t>
@@ -8356,6 +8415,7 @@
                   <a:srgbClr val="1F2A37"/>
                 </a:solidFill>
                 <a:latin typeface="Amiri" pitchFamily="2" charset="-78"/>
+                <a:ea typeface="Amiri" pitchFamily="2" charset="-78"/>
                 <a:cs typeface="Amiri" pitchFamily="2" charset="-78"/>
               </a:rPr>
               <a:t>فِي صَبَاحِ العِيدِ لَبِسْتُ فُسْتَانًا جَدِيدًا اشْتَرَتْهُ لِي أُمِّي. أَوَّلًا، صَلَّيْنَا فِي الحَدِيقَةِ مَعَ النَّاسِ. ثُمَّ أَكَلْنَا الفُطُورَ مَعًا فِي البَيْتِ. بَعْدَ ذٰلِكَ جَاءَ أَعْمَامِي وَأَوْلَادُهُمْ، وَأَعْطَانِي عَمِّي عِيدِيَّةً كَبِيرَةً، فَاشْتَرَيْتُ بِهَا كِتَابًا جَدِيدًا. أَخِيرًا، ذَهَبْنَا إِلَى المَلَاهِي فِي المَسَاءِ، وَرَكِبْنَا العَجَلَةَ الكَبِيرَةَ مَعًا.</a:t>
@@ -8375,6 +8435,7 @@
                   <a:srgbClr val="1F2A37"/>
                 </a:solidFill>
                 <a:latin typeface="Amiri" pitchFamily="2" charset="-78"/>
+                <a:ea typeface="Amiri" pitchFamily="2" charset="-78"/>
                 <a:cs typeface="Amiri" pitchFamily="2" charset="-78"/>
               </a:rPr>
               <a:t>فِي كُلِّ عِيدٍ نَحْتَفِلُ مَعًا، لٰكِنَّ ذٰلِكَ العِيدَ كَانَ مُخْتَلِفًا، لِأَنَّ جَدَّتِي كَانَتْ مَعَنَا. فِي العِيدِ القَادِمِ سَنُسَافِرُ إِلَى الأُرْدُنِّ لِنَزُورَهَا هُنَاكَ إِنْ شَاءَ اللّٰهُ.</a:t>
@@ -8538,11 +8599,12 @@
               <a:buNone/>
             </a:pPr>
             <a:r>
-              <a:rPr lang="en-US" sz="950" b="1" dirty="0">
+              <a:rPr lang="ar-SA" sz="950" b="1" dirty="0">
                 <a:solidFill>
                   <a:srgbClr val="FFFFFF"/>
                 </a:solidFill>
                 <a:latin typeface="Calibri" pitchFamily="34" charset="0"/>
+                <a:ea typeface="Amiri" pitchFamily="2" charset="-78"/>
                 <a:cs typeface="Amiri" pitchFamily="2" charset="-78"/>
               </a:rPr>
               <a:t>وَعَلَّمَتْنِي وَصْفَتَهَا</a:t>
@@ -8603,11 +8665,12 @@
               <a:buNone/>
             </a:pPr>
             <a:r>
-              <a:rPr lang="en-US" sz="950" b="1" dirty="0">
+              <a:rPr lang="ar-SA" sz="950" b="1" dirty="0">
                 <a:solidFill>
                   <a:srgbClr val="FFFFFF"/>
                 </a:solidFill>
                 <a:latin typeface="Calibri" pitchFamily="34" charset="0"/>
+                <a:ea typeface="Amiri" pitchFamily="2" charset="-78"/>
                 <a:cs typeface="Amiri" pitchFamily="2" charset="-78"/>
               </a:rPr>
               <a:t>أَوَّلًا … ثُمَّ</a:t>
@@ -8668,11 +8731,12 @@
               <a:buNone/>
             </a:pPr>
             <a:r>
-              <a:rPr lang="en-US" sz="950" b="1" dirty="0">
+              <a:rPr lang="ar-SA" sz="950" b="1" dirty="0">
                 <a:solidFill>
                   <a:srgbClr val="FFFFFF"/>
                 </a:solidFill>
                 <a:latin typeface="Calibri" pitchFamily="34" charset="0"/>
+                <a:ea typeface="Amiri" pitchFamily="2" charset="-78"/>
                 <a:cs typeface="Amiri" pitchFamily="2" charset="-78"/>
               </a:rPr>
               <a:t>أَعْطَانِي عَمِّي</a:t>
@@ -8733,11 +8797,12 @@
               <a:buNone/>
             </a:pPr>
             <a:r>
-              <a:rPr lang="en-US" sz="950" b="1" dirty="0">
+              <a:rPr lang="ar-SA" sz="950" b="1" dirty="0">
                 <a:solidFill>
                   <a:srgbClr val="FFFFFF"/>
                 </a:solidFill>
                 <a:latin typeface="Calibri" pitchFamily="34" charset="0"/>
+                <a:ea typeface="Amiri" pitchFamily="2" charset="-78"/>
                 <a:cs typeface="Amiri" pitchFamily="2" charset="-78"/>
               </a:rPr>
               <a:t>لِنَزُورَهَا</a:t>
@@ -8871,6 +8936,7 @@
                   <a:srgbClr val="D4AF37"/>
                 </a:solidFill>
                 <a:latin typeface="Amiri" pitchFamily="2" charset="-78"/>
+                <a:ea typeface="Amiri" pitchFamily="2" charset="-78"/>
                 <a:cs typeface="Amiri" pitchFamily="2" charset="-78"/>
               </a:rPr>
               <a:t>م</a:t>
@@ -9128,6 +9194,7 @@
                   <a:srgbClr val="8A6D1E"/>
                 </a:solidFill>
                 <a:latin typeface="Amiri" pitchFamily="2" charset="-78"/>
+                <a:ea typeface="Amiri" pitchFamily="2" charset="-78"/>
                 <a:cs typeface="Amiri" pitchFamily="2" charset="-78"/>
               </a:rPr>
               <a:t>أ</a:t>
@@ -9192,6 +9259,7 @@
                   <a:srgbClr val="1B3B6F"/>
                 </a:solidFill>
                 <a:latin typeface="Amiri" pitchFamily="2" charset="-78"/>
+                <a:ea typeface="Amiri" pitchFamily="2" charset="-78"/>
                 <a:cs typeface="Amiri" pitchFamily="2" charset="-78"/>
               </a:rPr>
               <a:t>أ</a:t>
@@ -9243,6 +9311,7 @@
                   <a:srgbClr val="8A6D1E"/>
                 </a:solidFill>
                 <a:latin typeface="Amiri" pitchFamily="2" charset="-78"/>
+                <a:ea typeface="Amiri" pitchFamily="2" charset="-78"/>
                 <a:cs typeface="Amiri" pitchFamily="2" charset="-78"/>
               </a:rPr>
               <a:t>نَمُوذَجُ الإِجَابَةِ</a:t>
@@ -9356,6 +9425,7 @@
                   <a:srgbClr val="1F2A37"/>
                 </a:solidFill>
                 <a:latin typeface="Amiri" pitchFamily="2" charset="-78"/>
+                <a:ea typeface="Amiri" pitchFamily="2" charset="-78"/>
                 <a:cs typeface="Amiri" pitchFamily="2" charset="-78"/>
               </a:rPr>
               <a:t>لَا أَتَذَكَّرُ كُلَّ الأَعْيَادِ الَّتِي احْتَفَلْتُ بِهَا، غَيْرَ أَنَّ عِيدَ الفِطْرِ المَاضِيَ مَحْفُورٌ فِي ذَاكِرَتِي؛ فَفِيهِ عَادَتْ جَدَّتِي إِلَى بَيْتِنَا بَعْدَ غِيَابٍ دَامَ خَمْسَ سَنَوَاتٍ، قَضَتْهَا فِي عَمَّانَ بَعِيدَةً عَنْ أَحْفَادِهَا.</a:t>
@@ -9375,6 +9445,7 @@
                   <a:srgbClr val="1F2A37"/>
                 </a:solidFill>
                 <a:latin typeface="Amiri" pitchFamily="2" charset="-78"/>
+                <a:ea typeface="Amiri" pitchFamily="2" charset="-78"/>
                 <a:cs typeface="Amiri" pitchFamily="2" charset="-78"/>
               </a:rPr>
               <a:t>وَقَدْ بَدَأَتْ فَرْحَتُهُ قَبْلَهُ بِأَيَّامٍ؛ فَكُنْتُ أَعُدُّ اللَّيَالِيَ الأَخِيرَةَ مِنْ رَمَضَانَ، وَأَتَعَلَّمُ مِنْ جَدَّتِي وَصْفَةَ كَعْكِهَا الَّتِي وَرِثَتْهَا عَنْ أُمِّهَا، ثُمَّ نُوَزِّعُهُ مَعًا عَلَى جِيرَانِنَا مِنْ كُلِّ الأَدْيَانِ، فَيَرُدُّونَ الأَطْبَاقَ مَلِيئَةً بِحَلَوِيَّاتِهِمْ.</a:t>
@@ -9394,6 +9465,7 @@
                   <a:srgbClr val="1F2A37"/>
                 </a:solidFill>
                 <a:latin typeface="Amiri" pitchFamily="2" charset="-78"/>
+                <a:ea typeface="Amiri" pitchFamily="2" charset="-78"/>
                 <a:cs typeface="Amiri" pitchFamily="2" charset="-78"/>
               </a:rPr>
               <a:t>وَفِي صَبَاحِ العِيدِ، بَعْدَ أَنْ صَلَّيْنَا فِي الحَدِيقَةِ وَسَطَ آلَافِ المُصَلِّينَ، امْتَلَأَ بَيْتُنَا بِالأَقَارِبِ وَالضَّحِكَاتِ وَرَائِحَةِ القَهْوَةِ العَرَبِيَّةِ. وَحِينَ أَخْرَجَتْ جَدَّتِي مِنْ حَقِيبَتِهَا قِلَادَةً قَدِيمَةً وَأَهْدَتْنِي إِيَّاهَا قَائِلَةً: "هٰذِهِ كَانَتْ لِي حِينَ كُنْتُ فِي عُمْرِكِ"، لَمْ أَسْتَطِعْ أَنْ أَحْبِسَ دُمُوعِي.</a:t>
@@ -9413,6 +9485,7 @@
                   <a:srgbClr val="1F2A37"/>
                 </a:solidFill>
                 <a:latin typeface="Amiri" pitchFamily="2" charset="-78"/>
+                <a:ea typeface="Amiri" pitchFamily="2" charset="-78"/>
                 <a:cs typeface="Amiri" pitchFamily="2" charset="-78"/>
               </a:rPr>
               <a:t>أَدْرَكْتُ يَوْمَهَا أَنَّ العِيدَ لَيْسَ مَلَابِسَ جَدِيدَةً وَلَا هَدَايَا، بَلْ هُوَ لَمَّةُ القُلُوبِ الَّتِي تُبَاعِدُ بَيْنَهَا المَسَافَاتُ طُولَ العَامِ. وَلَوْ خُيِّرْتُ أَنْ أَعِيشَ يَوْمًا وَاحِدًا مِنْ جَدِيدٍ، لَاخْتَرْتُ ذٰلِكَ الصَّبَاحَ دُونَ تَرَدُّدٍ.</a:t>
@@ -9511,11 +9584,12 @@
               <a:buNone/>
             </a:pPr>
             <a:r>
-              <a:rPr lang="en-US" sz="950" b="1" dirty="0">
+              <a:rPr lang="ar-SA" sz="950" b="1" dirty="0">
                 <a:solidFill>
                   <a:srgbClr val="FFFFFF"/>
                 </a:solidFill>
                 <a:latin typeface="Calibri" pitchFamily="34" charset="0"/>
+                <a:ea typeface="Amiri" pitchFamily="2" charset="-78"/>
                 <a:cs typeface="Amiri" pitchFamily="2" charset="-78"/>
               </a:rPr>
               <a:t>مَحْفُورٌ فِي ذَاكِرَتِي</a:t>
@@ -9576,11 +9650,12 @@
               <a:buNone/>
             </a:pPr>
             <a:r>
-              <a:rPr lang="en-US" sz="950" b="1" dirty="0">
+              <a:rPr lang="ar-SA" sz="950" b="1" dirty="0">
                 <a:solidFill>
                   <a:srgbClr val="FFFFFF"/>
                 </a:solidFill>
                 <a:latin typeface="Calibri" pitchFamily="34" charset="0"/>
+                <a:ea typeface="Amiri" pitchFamily="2" charset="-78"/>
                 <a:cs typeface="Amiri" pitchFamily="2" charset="-78"/>
               </a:rPr>
               <a:t>الَّتِي وَرِثَتْهَا</a:t>
@@ -9641,11 +9716,12 @@
               <a:buNone/>
             </a:pPr>
             <a:r>
-              <a:rPr lang="en-US" sz="950" b="1" dirty="0">
+              <a:rPr lang="ar-SA" sz="950" b="1" dirty="0">
                 <a:solidFill>
                   <a:srgbClr val="FFFFFF"/>
                 </a:solidFill>
                 <a:latin typeface="Calibri" pitchFamily="34" charset="0"/>
+                <a:ea typeface="Amiri" pitchFamily="2" charset="-78"/>
                 <a:cs typeface="Amiri" pitchFamily="2" charset="-78"/>
               </a:rPr>
               <a:t>أَهْدَتْنِي إِيَّاهَا قَائِلَةً</a:t>
@@ -9706,11 +9782,12 @@
               <a:buNone/>
             </a:pPr>
             <a:r>
-              <a:rPr lang="en-US" sz="950" b="1" dirty="0">
+              <a:rPr lang="ar-SA" sz="950" b="1" dirty="0">
                 <a:solidFill>
                   <a:srgbClr val="FFFFFF"/>
                 </a:solidFill>
                 <a:latin typeface="Calibri" pitchFamily="34" charset="0"/>
+                <a:ea typeface="Amiri" pitchFamily="2" charset="-78"/>
                 <a:cs typeface="Amiri" pitchFamily="2" charset="-78"/>
               </a:rPr>
               <a:t>لَوْ خُيِّرْتُ … لَاخْتَرْتُ</a:t>
@@ -9844,6 +9921,7 @@
                   <a:srgbClr val="D4AF37"/>
                 </a:solidFill>
                 <a:latin typeface="Amiri" pitchFamily="2" charset="-78"/>
+                <a:ea typeface="Amiri" pitchFamily="2" charset="-78"/>
                 <a:cs typeface="Amiri" pitchFamily="2" charset="-78"/>
               </a:rPr>
               <a:t>م</a:t>
@@ -10101,6 +10179,7 @@
                   <a:srgbClr val="8A6D1E"/>
                 </a:solidFill>
                 <a:latin typeface="Amiri" pitchFamily="2" charset="-78"/>
+                <a:ea typeface="Amiri" pitchFamily="2" charset="-78"/>
                 <a:cs typeface="Amiri" pitchFamily="2" charset="-78"/>
               </a:rPr>
               <a:t>ب</a:t>
@@ -10165,6 +10244,7 @@
                   <a:srgbClr val="1B3B6F"/>
                 </a:solidFill>
                 <a:latin typeface="Amiri" pitchFamily="2" charset="-78"/>
+                <a:ea typeface="Amiri" pitchFamily="2" charset="-78"/>
                 <a:cs typeface="Amiri" pitchFamily="2" charset="-78"/>
               </a:rPr>
               <a:t>ب</a:t>
@@ -10216,6 +10296,7 @@
                   <a:srgbClr val="8A6D1E"/>
                 </a:solidFill>
                 <a:latin typeface="Amiri" pitchFamily="2" charset="-78"/>
+                <a:ea typeface="Amiri" pitchFamily="2" charset="-78"/>
                 <a:cs typeface="Amiri" pitchFamily="2" charset="-78"/>
               </a:rPr>
               <a:t>نَمُوذَجُ الإِجَابَةِ</a:t>
@@ -10329,6 +10410,7 @@
                   <a:srgbClr val="1F2A37"/>
                 </a:solidFill>
                 <a:latin typeface="Amiri" pitchFamily="2" charset="-78"/>
+                <a:ea typeface="Amiri" pitchFamily="2" charset="-78"/>
                 <a:cs typeface="Amiri" pitchFamily="2" charset="-78"/>
               </a:rPr>
               <a:t>قَبْلَ أَسَابِيعَ مِنْ كُلِّ عِيدٍ، تَمْتَلِئُ المَحَلَّاتُ بِالزِّينَةِ وَالعُرُوضِ، وَتُطَارِدُنَا الإِعْلَانَاتُ عَلَى هَوَاتِفِنَا وَشَاشَاتِ التِّلْفَازِ. فَهَلْ فَقَدَتِ الأَعْيَادُ مَعْنَاهَا الحَقِيقِيَّ وَصَارَتْ مُنَاسَبَاتٍ لِلشِّرَاءِ فَقَطْ؟</a:t>
@@ -10348,6 +10430,7 @@
                   <a:srgbClr val="1F2A37"/>
                 </a:solidFill>
                 <a:latin typeface="Amiri" pitchFamily="2" charset="-78"/>
+                <a:ea typeface="Amiri" pitchFamily="2" charset="-78"/>
                 <a:cs typeface="Amiri" pitchFamily="2" charset="-78"/>
               </a:rPr>
               <a:t>لَا شَكَّ أَنَّ الجَانِبَ التِّجَارِيَّ صَارَ أَكْبَرَ مِمَّا كَانَ فِي زَمَنِ أَجْدَادِنَا بِكَثِيرٍ؛ فَكَثِيرٌ مِنَ العَائِلَاتِ تُنْفِقُ أَكْثَرَ مِمَّا تَسْتَطِيعُ، وَبَعْضُ الأَطْفَالِ يَحْكُمُونَ عَلَى العِيدِ بِقِيمَةِ هَدَايَاهُمْ، لَا بِالوَقْتِ الَّذِي قَضَوْهُ مَعَ أَحِبَّائِهِمْ. وَمَعَ ذٰلِكَ، فَإِنَّ جَوْهَرَ الأَعْيَادِ الدِّينِيَّةِ مَا زَالَ حَيًّا: الصَّلَاةُ، وَصِلَةُ الرَّحِمِ، وَمُسَاعَدَةُ المُحْتَاجِينَ وَالفُقَرَاءِ.</a:t>
@@ -10367,6 +10450,7 @@
                   <a:srgbClr val="1F2A37"/>
                 </a:solidFill>
                 <a:latin typeface="Amiri" pitchFamily="2" charset="-78"/>
+                <a:ea typeface="Amiri" pitchFamily="2" charset="-78"/>
                 <a:cs typeface="Amiri" pitchFamily="2" charset="-78"/>
               </a:rPr>
               <a:t>وَقَدْ رَأَيْتُ ذٰلِكَ فِي العِيدِ المَاضِي، عِنْدَمَا قَرَّرَتْ أُسْرَتِي أَنْ تَشْتَرِيَ هَدَايَا أَقَلَّ، وَأَنْ تُرْسِلَ الفَرْقَ إِلَى أُسَرٍ لَاجِئَةٍ فِي مَدِينَتِنَا، عَنْ طَرِيقِ جَمْعِيَّةِ المَسْجِدِ. فَلَمْ نَشْعُرْ بِأَنَّنَا خَسِرْنَا شَيْئًا، بَلْ كَانَ ذٰلِكَ أَسْعَدَ عِيدٍ عِشْنَاهُ مُنْذُ سَنَوَاتٍ.</a:t>
@@ -10386,6 +10470,7 @@
                   <a:srgbClr val="1F2A37"/>
                 </a:solidFill>
                 <a:latin typeface="Amiri" pitchFamily="2" charset="-78"/>
+                <a:ea typeface="Amiri" pitchFamily="2" charset="-78"/>
                 <a:cs typeface="Amiri" pitchFamily="2" charset="-78"/>
               </a:rPr>
               <a:t>لِذٰلِكَ أَرَى أَنَّ الأَعْيَادَ لَمْ تَفْقِدْ مَعْنَاهَا، وَإِنَّمَا نَحْنُ الَّذِينَ نَنْسَاهُ أَحْيَانًا وَسَطَ الزِّحَامِ. فَإِذَا تَذَكَّرْنَا لِمَاذَا نَحْتَفِلُ، فَسَيَبْقَى العِيدُ يَوْمًا لِلْقُلُوبِ لَا لِلْجُيُوبِ.</a:t>
@@ -10484,11 +10569,12 @@
               <a:buNone/>
             </a:pPr>
             <a:r>
-              <a:rPr lang="en-US" sz="950" b="1" dirty="0">
+              <a:rPr lang="ar-SA" sz="950" b="1" dirty="0">
                 <a:solidFill>
                   <a:srgbClr val="FFFFFF"/>
                 </a:solidFill>
                 <a:latin typeface="Calibri" pitchFamily="34" charset="0"/>
+                <a:ea typeface="Amiri" pitchFamily="2" charset="-78"/>
                 <a:cs typeface="Amiri" pitchFamily="2" charset="-78"/>
               </a:rPr>
               <a:t>تُطَارِدُنَا الإِعْلَانَاتُ</a:t>
@@ -10549,11 +10635,12 @@
               <a:buNone/>
             </a:pPr>
             <a:r>
-              <a:rPr lang="en-US" sz="950" b="1" dirty="0">
+              <a:rPr lang="ar-SA" sz="950" b="1" dirty="0">
                 <a:solidFill>
                   <a:srgbClr val="FFFFFF"/>
                 </a:solidFill>
                 <a:latin typeface="Calibri" pitchFamily="34" charset="0"/>
+                <a:ea typeface="Amiri" pitchFamily="2" charset="-78"/>
                 <a:cs typeface="Amiri" pitchFamily="2" charset="-78"/>
               </a:rPr>
               <a:t>أَكْثَرَ مِمَّا تَسْتَطِيعُ</a:t>
@@ -10614,11 +10701,12 @@
               <a:buNone/>
             </a:pPr>
             <a:r>
-              <a:rPr lang="en-US" sz="950" b="1" dirty="0">
+              <a:rPr lang="ar-SA" sz="950" b="1" dirty="0">
                 <a:solidFill>
                   <a:srgbClr val="FFFFFF"/>
                 </a:solidFill>
                 <a:latin typeface="Calibri" pitchFamily="34" charset="0"/>
+                <a:ea typeface="Amiri" pitchFamily="2" charset="-78"/>
                 <a:cs typeface="Amiri" pitchFamily="2" charset="-78"/>
               </a:rPr>
               <a:t>أَسْعَدَ عِيدٍ عِشْنَاهُ</a:t>
@@ -10679,11 +10767,12 @@
               <a:buNone/>
             </a:pPr>
             <a:r>
-              <a:rPr lang="en-US" sz="950" b="1" dirty="0">
+              <a:rPr lang="ar-SA" sz="950" b="1" dirty="0">
                 <a:solidFill>
                   <a:srgbClr val="FFFFFF"/>
                 </a:solidFill>
                 <a:latin typeface="Calibri" pitchFamily="34" charset="0"/>
+                <a:ea typeface="Amiri" pitchFamily="2" charset="-78"/>
                 <a:cs typeface="Amiri" pitchFamily="2" charset="-78"/>
               </a:rPr>
               <a:t>لِلْقُلُوبِ لَا لِلْجُيُوبِ</a:t>
@@ -10817,6 +10906,7 @@
                   <a:srgbClr val="D4AF37"/>
                 </a:solidFill>
                 <a:latin typeface="Amiri" pitchFamily="2" charset="-78"/>
+                <a:ea typeface="Amiri" pitchFamily="2" charset="-78"/>
                 <a:cs typeface="Amiri" pitchFamily="2" charset="-78"/>
               </a:rPr>
               <a:t>م</a:t>
@@ -11137,6 +11227,7 @@
                   <a:srgbClr val="8A6D1E"/>
                 </a:solidFill>
                 <a:latin typeface="Amiri" pitchFamily="2" charset="-78"/>
+                <a:ea typeface="Amiri" pitchFamily="2" charset="-78"/>
                 <a:cs typeface="Amiri" pitchFamily="2" charset="-78"/>
               </a:rPr>
               <a:t>قَيِّمْ عَمَلَكَ</a:t>
@@ -12381,6 +12472,7 @@
                   <a:srgbClr val="FFFFFF"/>
                 </a:solidFill>
                 <a:latin typeface="Amiri" pitchFamily="2" charset="-78"/>
+                <a:ea typeface="Amiri" pitchFamily="2" charset="-78"/>
                 <a:cs typeface="Amiri" pitchFamily="2" charset="-78"/>
               </a:rPr>
               <a:t>أَحْسَنْتُمْ! إِلَى اللِّقَاءِ</a:t>
@@ -12533,6 +12625,7 @@
                   <a:srgbClr val="D4AF37"/>
                 </a:solidFill>
                 <a:latin typeface="Amiri" pitchFamily="2" charset="-78"/>
+                <a:ea typeface="Amiri" pitchFamily="2" charset="-78"/>
                 <a:cs typeface="Amiri" pitchFamily="2" charset="-78"/>
               </a:rPr>
               <a:t>وَرْشَةُ التَّدْرِيبِ</a:t>
@@ -12666,6 +12759,7 @@
                   <a:srgbClr val="D4AF37"/>
                 </a:solidFill>
                 <a:latin typeface="Amiri" pitchFamily="2" charset="-78"/>
+                <a:ea typeface="Amiri" pitchFamily="2" charset="-78"/>
                 <a:cs typeface="Amiri" pitchFamily="2" charset="-78"/>
               </a:rPr>
               <a:t>م</a:t>
@@ -12986,6 +13080,7 @@
                   <a:srgbClr val="8A6D1E"/>
                 </a:solidFill>
                 <a:latin typeface="Amiri" pitchFamily="2" charset="-78"/>
+                <a:ea typeface="Amiri" pitchFamily="2" charset="-78"/>
                 <a:cs typeface="Amiri" pitchFamily="2" charset="-78"/>
               </a:rPr>
               <a:t>آدَابُ الصَّفِّ</a:t>
@@ -14517,6 +14612,7 @@
                   <a:srgbClr val="D4AF37"/>
                 </a:solidFill>
                 <a:latin typeface="Amiri" pitchFamily="2" charset="-78"/>
+                <a:ea typeface="Amiri" pitchFamily="2" charset="-78"/>
                 <a:cs typeface="Amiri" pitchFamily="2" charset="-78"/>
               </a:rPr>
               <a:t>م</a:t>
@@ -14837,6 +14933,7 @@
                   <a:srgbClr val="8A6D1E"/>
                 </a:solidFill>
                 <a:latin typeface="Amiri" pitchFamily="2" charset="-78"/>
+                <a:ea typeface="Amiri" pitchFamily="2" charset="-78"/>
                 <a:cs typeface="Amiri" pitchFamily="2" charset="-78"/>
               </a:rPr>
               <a:t>خَرِيطَةُ الوَرْشَةِ</a:t>
@@ -15151,6 +15248,7 @@
                   <a:srgbClr val="1B3B6F"/>
                 </a:solidFill>
                 <a:latin typeface="Amiri" pitchFamily="2" charset="-78"/>
+                <a:ea typeface="Amiri" pitchFamily="2" charset="-78"/>
                 <a:cs typeface="Amiri" pitchFamily="2" charset="-78"/>
               </a:rPr>
               <a:t>كَيْفَ</a:t>
@@ -15427,6 +15525,7 @@
                   <a:srgbClr val="1E6B52"/>
                 </a:solidFill>
                 <a:latin typeface="Amiri" pitchFamily="2" charset="-78"/>
+                <a:ea typeface="Amiri" pitchFamily="2" charset="-78"/>
                 <a:cs typeface="Amiri" pitchFamily="2" charset="-78"/>
               </a:rPr>
               <a:t>الاسْتِمَارَةُ</a:t>
@@ -15703,6 +15802,7 @@
                   <a:srgbClr val="1E6B52"/>
                 </a:solidFill>
                 <a:latin typeface="Amiri" pitchFamily="2" charset="-78"/>
+                <a:ea typeface="Amiri" pitchFamily="2" charset="-78"/>
                 <a:cs typeface="Amiri" pitchFamily="2" charset="-78"/>
               </a:rPr>
               <a:t>الرِّسَالَةُ</a:t>
@@ -15979,6 +16079,7 @@
                   <a:srgbClr val="1E6B52"/>
                 </a:solidFill>
                 <a:latin typeface="Amiri" pitchFamily="2" charset="-78"/>
+                <a:ea typeface="Amiri" pitchFamily="2" charset="-78"/>
                 <a:cs typeface="Amiri" pitchFamily="2" charset="-78"/>
               </a:rPr>
               <a:t>المَقَالُ</a:t>
@@ -16255,6 +16356,7 @@
                   <a:srgbClr val="8A6D1E"/>
                 </a:solidFill>
                 <a:latin typeface="Amiri" pitchFamily="2" charset="-78"/>
+                <a:ea typeface="Amiri" pitchFamily="2" charset="-78"/>
                 <a:cs typeface="Amiri" pitchFamily="2" charset="-78"/>
               </a:rPr>
               <a:t>قَيِّمْ</a:t>
@@ -16498,6 +16600,7 @@
                   <a:srgbClr val="D4AF37"/>
                 </a:solidFill>
                 <a:latin typeface="Amiri" pitchFamily="2" charset="-78"/>
+                <a:ea typeface="Amiri" pitchFamily="2" charset="-78"/>
                 <a:cs typeface="Amiri" pitchFamily="2" charset="-78"/>
               </a:rPr>
               <a:t>م</a:t>
@@ -16818,6 +16921,7 @@
                   <a:srgbClr val="8A6D1E"/>
                 </a:solidFill>
                 <a:latin typeface="Amiri" pitchFamily="2" charset="-78"/>
+                <a:ea typeface="Amiri" pitchFamily="2" charset="-78"/>
                 <a:cs typeface="Amiri" pitchFamily="2" charset="-78"/>
               </a:rPr>
               <a:t>امْتِحَانُ الكِتَابَةِ</a:t>
@@ -17442,6 +17546,7 @@
                   <a:srgbClr val="1B3B6F"/>
                 </a:solidFill>
                 <a:latin typeface="Amiri" pitchFamily="2" charset="-78"/>
+                <a:ea typeface="Amiri" pitchFamily="2" charset="-78"/>
                 <a:cs typeface="Amiri" pitchFamily="2" charset="-78"/>
               </a:rPr>
               <a:t>اشْتَرَيْتُ فُسْتَانًا أَزْرَقَ، وَلَبِسْتُهُ صَبَاحَ العِيدِ</a:t>
@@ -17541,6 +17646,7 @@
                   <a:srgbClr val="1B3B6F"/>
                 </a:solidFill>
                 <a:latin typeface="Amiri" pitchFamily="2" charset="-78"/>
+                <a:ea typeface="Amiri" pitchFamily="2" charset="-78"/>
                 <a:cs typeface="Amiri" pitchFamily="2" charset="-78"/>
               </a:rPr>
               <a:t>أَوَّلًا … ثُمَّ … بَعْدَ ذٰلِكَ … أَخِيرًا …</a:t>
@@ -17640,6 +17746,7 @@
                   <a:srgbClr val="1B3B6F"/>
                 </a:solidFill>
                 <a:latin typeface="Amiri" pitchFamily="2" charset="-78"/>
+                <a:ea typeface="Amiri" pitchFamily="2" charset="-78"/>
                 <a:cs typeface="Amiri" pitchFamily="2" charset="-78"/>
               </a:rPr>
               <a:t>أَهْدَتْنِي إِيَّاهَا خَالَتِي</a:t>
@@ -17811,6 +17918,7 @@
                   <a:srgbClr val="D4AF37"/>
                 </a:solidFill>
                 <a:latin typeface="Amiri" pitchFamily="2" charset="-78"/>
+                <a:ea typeface="Amiri" pitchFamily="2" charset="-78"/>
                 <a:cs typeface="Amiri" pitchFamily="2" charset="-78"/>
               </a:rPr>
               <a:t>م</a:t>
@@ -18131,6 +18239,7 @@
                   <a:srgbClr val="8A6D1E"/>
                 </a:solidFill>
                 <a:latin typeface="Amiri" pitchFamily="2" charset="-78"/>
+                <a:ea typeface="Amiri" pitchFamily="2" charset="-78"/>
                 <a:cs typeface="Amiri" pitchFamily="2" charset="-78"/>
               </a:rPr>
               <a:t>اسْتِمَارَةُ احْتِفَالِ المَدْرَسَةِ بِالعِيدِ</a:t>
@@ -18487,6 +18596,7 @@
                   <a:srgbClr val="1B3B6F"/>
                 </a:solidFill>
                 <a:latin typeface="Amiri" pitchFamily="2" charset="-78"/>
+                <a:ea typeface="Amiri" pitchFamily="2" charset="-78"/>
                 <a:cs typeface="Amiri" pitchFamily="2" charset="-78"/>
               </a:rPr>
               <a:t>الاسْمُ وَالصَّفُّ</a:t>
@@ -18731,6 +18841,7 @@
                   <a:srgbClr val="1B3B6F"/>
                 </a:solidFill>
                 <a:latin typeface="Amiri" pitchFamily="2" charset="-78"/>
+                <a:ea typeface="Amiri" pitchFamily="2" charset="-78"/>
                 <a:cs typeface="Amiri" pitchFamily="2" charset="-78"/>
               </a:rPr>
               <a:t>العِيدُ</a:t>
@@ -18975,6 +19086,7 @@
                   <a:srgbClr val="1B3B6F"/>
                 </a:solidFill>
                 <a:latin typeface="Amiri" pitchFamily="2" charset="-78"/>
+                <a:ea typeface="Amiri" pitchFamily="2" charset="-78"/>
                 <a:cs typeface="Amiri" pitchFamily="2" charset="-78"/>
               </a:rPr>
               <a:t>أَكْلَةٌ سَتُحْضِرِينَهَا</a:t>
@@ -19219,6 +19331,7 @@
                   <a:srgbClr val="1B3B6F"/>
                 </a:solidFill>
                 <a:latin typeface="Amiri" pitchFamily="2" charset="-78"/>
+                <a:ea typeface="Amiri" pitchFamily="2" charset="-78"/>
                 <a:cs typeface="Amiri" pitchFamily="2" charset="-78"/>
               </a:rPr>
               <a:t>نَشَاطٌ تُشَارِكِينَ فِيهِ</a:t>
@@ -19463,6 +19576,7 @@
                   <a:srgbClr val="1B3B6F"/>
                 </a:solidFill>
                 <a:latin typeface="Amiri" pitchFamily="2" charset="-78"/>
+                <a:ea typeface="Amiri" pitchFamily="2" charset="-78"/>
                 <a:cs typeface="Amiri" pitchFamily="2" charset="-78"/>
               </a:rPr>
               <a:t>المَلَابِسُ</a:t>
@@ -19707,6 +19821,7 @@
                   <a:srgbClr val="1B3B6F"/>
                 </a:solidFill>
                 <a:latin typeface="Amiri" pitchFamily="2" charset="-78"/>
+                <a:ea typeface="Amiri" pitchFamily="2" charset="-78"/>
                 <a:cs typeface="Amiri" pitchFamily="2" charset="-78"/>
               </a:rPr>
               <a:t>التَّهْنِئَةُ بِالعَرَبِيَّةِ</a:t>
@@ -19951,6 +20066,7 @@
                   <a:srgbClr val="1B3B6F"/>
                 </a:solidFill>
                 <a:latin typeface="Amiri" pitchFamily="2" charset="-78"/>
+                <a:ea typeface="Amiri" pitchFamily="2" charset="-78"/>
                 <a:cs typeface="Amiri" pitchFamily="2" charset="-78"/>
               </a:rPr>
               <a:t>كَلِمَةٌ تَصِفُ العِيدَ</a:t>
@@ -20130,6 +20246,7 @@
                   <a:srgbClr val="1B3B6F"/>
                 </a:solidFill>
                 <a:latin typeface="Amiri" pitchFamily="2" charset="-78"/>
+                <a:ea typeface="Amiri" pitchFamily="2" charset="-78"/>
                 <a:cs typeface="Amiri" pitchFamily="2" charset="-78"/>
               </a:rPr>
               <a:t>جُمْلَةٌ: مَاذَا فَعَلْتِ فِي العِيدِ المَاضِي؟</a:t>
@@ -20339,6 +20456,7 @@
                   <a:srgbClr val="D4AF37"/>
                 </a:solidFill>
                 <a:latin typeface="Amiri" pitchFamily="2" charset="-78"/>
+                <a:ea typeface="Amiri" pitchFamily="2" charset="-78"/>
                 <a:cs typeface="Amiri" pitchFamily="2" charset="-78"/>
               </a:rPr>
               <a:t>م</a:t>
@@ -20659,6 +20777,7 @@
                   <a:srgbClr val="8A6D1E"/>
                 </a:solidFill>
                 <a:latin typeface="Amiri" pitchFamily="2" charset="-78"/>
+                <a:ea typeface="Amiri" pitchFamily="2" charset="-78"/>
                 <a:cs typeface="Amiri" pitchFamily="2" charset="-78"/>
               </a:rPr>
               <a:t>نَمُوذَجُ الإِجَابَةِ</a:t>
@@ -20977,6 +21096,7 @@
                   <a:srgbClr val="1B3B6F"/>
                 </a:solidFill>
                 <a:latin typeface="Amiri" pitchFamily="2" charset="-78"/>
+                <a:ea typeface="Amiri" pitchFamily="2" charset="-78"/>
                 <a:cs typeface="Amiri" pitchFamily="2" charset="-78"/>
               </a:rPr>
               <a:t>زَيْنَبُ عَلِيٌّ، العَاشِرُ</a:t>
@@ -21015,6 +21135,7 @@
                   <a:srgbClr val="1B3B6F"/>
                 </a:solidFill>
                 <a:latin typeface="Amiri" pitchFamily="2" charset="-78"/>
+                <a:ea typeface="Amiri" pitchFamily="2" charset="-78"/>
                 <a:cs typeface="Amiri" pitchFamily="2" charset="-78"/>
               </a:rPr>
               <a:t>الاسْمُ وَالصَّفُّ</a:t>
@@ -21156,6 +21277,7 @@
                   <a:srgbClr val="1B3B6F"/>
                 </a:solidFill>
                 <a:latin typeface="Amiri" pitchFamily="2" charset="-78"/>
+                <a:ea typeface="Amiri" pitchFamily="2" charset="-78"/>
                 <a:cs typeface="Amiri" pitchFamily="2" charset="-78"/>
               </a:rPr>
               <a:t>عِيدُ الفِطْرِ</a:t>
@@ -21194,6 +21316,7 @@
                   <a:srgbClr val="1B3B6F"/>
                 </a:solidFill>
                 <a:latin typeface="Amiri" pitchFamily="2" charset="-78"/>
+                <a:ea typeface="Amiri" pitchFamily="2" charset="-78"/>
                 <a:cs typeface="Amiri" pitchFamily="2" charset="-78"/>
               </a:rPr>
               <a:t>العِيدُ</a:t>
@@ -21335,6 +21458,7 @@
                   <a:srgbClr val="1B3B6F"/>
                 </a:solidFill>
                 <a:latin typeface="Amiri" pitchFamily="2" charset="-78"/>
+                <a:ea typeface="Amiri" pitchFamily="2" charset="-78"/>
                 <a:cs typeface="Amiri" pitchFamily="2" charset="-78"/>
               </a:rPr>
               <a:t>المَعْمُولُ</a:t>
@@ -21373,6 +21497,7 @@
                   <a:srgbClr val="1B3B6F"/>
                 </a:solidFill>
                 <a:latin typeface="Amiri" pitchFamily="2" charset="-78"/>
+                <a:ea typeface="Amiri" pitchFamily="2" charset="-78"/>
                 <a:cs typeface="Amiri" pitchFamily="2" charset="-78"/>
               </a:rPr>
               <a:t>أَكْلَةٌ سَتُحْضِرِينَهَا</a:t>
@@ -21514,6 +21639,7 @@
                   <a:srgbClr val="1B3B6F"/>
                 </a:solidFill>
                 <a:latin typeface="Amiri" pitchFamily="2" charset="-78"/>
+                <a:ea typeface="Amiri" pitchFamily="2" charset="-78"/>
                 <a:cs typeface="Amiri" pitchFamily="2" charset="-78"/>
               </a:rPr>
               <a:t>رَسْمُ الحِنَّاءِ</a:t>
@@ -21552,6 +21678,7 @@
                   <a:srgbClr val="1B3B6F"/>
                 </a:solidFill>
                 <a:latin typeface="Amiri" pitchFamily="2" charset="-78"/>
+                <a:ea typeface="Amiri" pitchFamily="2" charset="-78"/>
                 <a:cs typeface="Amiri" pitchFamily="2" charset="-78"/>
               </a:rPr>
               <a:t>نَشَاطٌ تُشَارِكِينَ فِيهِ</a:t>
@@ -21693,6 +21820,7 @@
                   <a:srgbClr val="1B3B6F"/>
                 </a:solidFill>
                 <a:latin typeface="Amiri" pitchFamily="2" charset="-78"/>
+                <a:ea typeface="Amiri" pitchFamily="2" charset="-78"/>
                 <a:cs typeface="Amiri" pitchFamily="2" charset="-78"/>
               </a:rPr>
               <a:t>فُسْتَانٌ تَقْلِيدِيٌّ</a:t>
@@ -21731,6 +21859,7 @@
                   <a:srgbClr val="1B3B6F"/>
                 </a:solidFill>
                 <a:latin typeface="Amiri" pitchFamily="2" charset="-78"/>
+                <a:ea typeface="Amiri" pitchFamily="2" charset="-78"/>
                 <a:cs typeface="Amiri" pitchFamily="2" charset="-78"/>
               </a:rPr>
               <a:t>المَلَابِسُ</a:t>
@@ -21872,6 +22001,7 @@
                   <a:srgbClr val="1B3B6F"/>
                 </a:solidFill>
                 <a:latin typeface="Amiri" pitchFamily="2" charset="-78"/>
+                <a:ea typeface="Amiri" pitchFamily="2" charset="-78"/>
                 <a:cs typeface="Amiri" pitchFamily="2" charset="-78"/>
               </a:rPr>
               <a:t>عِيدٌ مُبَارَكٌ</a:t>
@@ -21910,6 +22040,7 @@
                   <a:srgbClr val="1B3B6F"/>
                 </a:solidFill>
                 <a:latin typeface="Amiri" pitchFamily="2" charset="-78"/>
+                <a:ea typeface="Amiri" pitchFamily="2" charset="-78"/>
                 <a:cs typeface="Amiri" pitchFamily="2" charset="-78"/>
               </a:rPr>
               <a:t>التَّهْنِئَةُ بِالعَرَبِيَّةِ</a:t>
@@ -22051,6 +22182,7 @@
                   <a:srgbClr val="1B3B6F"/>
                 </a:solidFill>
                 <a:latin typeface="Amiri" pitchFamily="2" charset="-78"/>
+                <a:ea typeface="Amiri" pitchFamily="2" charset="-78"/>
                 <a:cs typeface="Amiri" pitchFamily="2" charset="-78"/>
               </a:rPr>
               <a:t>فَرْحَةٌ</a:t>
@@ -22089,6 +22221,7 @@
                   <a:srgbClr val="1B3B6F"/>
                 </a:solidFill>
                 <a:latin typeface="Amiri" pitchFamily="2" charset="-78"/>
+                <a:ea typeface="Amiri" pitchFamily="2" charset="-78"/>
                 <a:cs typeface="Amiri" pitchFamily="2" charset="-78"/>
               </a:rPr>
               <a:t>كَلِمَةٌ تَصِفُ العِيدَ</a:t>
@@ -22230,6 +22363,7 @@
                   <a:srgbClr val="1B3B6F"/>
                 </a:solidFill>
                 <a:latin typeface="Amiri" pitchFamily="2" charset="-78"/>
+                <a:ea typeface="Amiri" pitchFamily="2" charset="-78"/>
                 <a:cs typeface="Amiri" pitchFamily="2" charset="-78"/>
               </a:rPr>
               <a:t>صَلَّيْتُ فِي الحَدِيقَةِ، ثُمَّ زُرْتُ جَدَّتِي وَأَهْدَيْتُهَا وُرُودًا.</a:t>
@@ -22268,6 +22402,7 @@
                   <a:srgbClr val="1B3B6F"/>
                 </a:solidFill>
                 <a:latin typeface="Amiri" pitchFamily="2" charset="-78"/>
+                <a:ea typeface="Amiri" pitchFamily="2" charset="-78"/>
                 <a:cs typeface="Amiri" pitchFamily="2" charset="-78"/>
               </a:rPr>
               <a:t>جُمْلَةٌ: مَاذَا فَعَلْتِ فِي العِيدِ المَاضِي؟</a:t>
@@ -22477,6 +22612,7 @@
                   <a:srgbClr val="D4AF37"/>
                 </a:solidFill>
                 <a:latin typeface="Amiri" pitchFamily="2" charset="-78"/>
+                <a:ea typeface="Amiri" pitchFamily="2" charset="-78"/>
                 <a:cs typeface="Amiri" pitchFamily="2" charset="-78"/>
               </a:rPr>
               <a:t>م</a:t>
@@ -22797,6 +22933,7 @@
                   <a:srgbClr val="8A6D1E"/>
                 </a:solidFill>
                 <a:latin typeface="Amiri" pitchFamily="2" charset="-78"/>
+                <a:ea typeface="Amiri" pitchFamily="2" charset="-78"/>
                 <a:cs typeface="Amiri" pitchFamily="2" charset="-78"/>
               </a:rPr>
               <a:t>كَيْفَ احْتَفَلْتُ بِالعِيدِ</a:t>
@@ -23272,6 +23409,7 @@
                   <a:srgbClr val="1B3B6F"/>
                 </a:solidFill>
                 <a:latin typeface="Amiri" pitchFamily="2" charset="-78"/>
+                <a:ea typeface="Amiri" pitchFamily="2" charset="-78"/>
                 <a:cs typeface="Amiri" pitchFamily="2" charset="-78"/>
               </a:rPr>
               <a:t>قَبْلَ العِيدِ اشْتَرَيْتُ … وَلَبِسْتُهُ …</a:t>
@@ -23348,6 +23486,7 @@
                   <a:srgbClr val="1B3B6F"/>
                 </a:solidFill>
                 <a:latin typeface="Amiri" pitchFamily="2" charset="-78"/>
+                <a:ea typeface="Amiri" pitchFamily="2" charset="-78"/>
                 <a:cs typeface="Amiri" pitchFamily="2" charset="-78"/>
               </a:rPr>
               <a:t>أَوَّلًا … ثُمَّ … بَعْدَ ذٰلِكَ …</a:t>
@@ -23424,6 +23563,7 @@
                   <a:srgbClr val="1B3B6F"/>
                 </a:solidFill>
                 <a:latin typeface="Amiri" pitchFamily="2" charset="-78"/>
+                <a:ea typeface="Amiri" pitchFamily="2" charset="-78"/>
                 <a:cs typeface="Amiri" pitchFamily="2" charset="-78"/>
               </a:rPr>
               <a:t>زُرْنَا … وَأَعْطَوْنِي عِيدِيَّةً</a:t>
@@ -23500,6 +23640,7 @@
                   <a:srgbClr val="1B3B6F"/>
                 </a:solidFill>
                 <a:latin typeface="Amiri" pitchFamily="2" charset="-78"/>
+                <a:ea typeface="Amiri" pitchFamily="2" charset="-78"/>
                 <a:cs typeface="Amiri" pitchFamily="2" charset="-78"/>
               </a:rPr>
               <a:t>فِي العِيدِ القَادِمِ سَأَطْبُخُ …</a:t>
@@ -23671,6 +23812,7 @@
                   <a:srgbClr val="D4AF37"/>
                 </a:solidFill>
                 <a:latin typeface="Amiri" pitchFamily="2" charset="-78"/>
+                <a:ea typeface="Amiri" pitchFamily="2" charset="-78"/>
                 <a:cs typeface="Amiri" pitchFamily="2" charset="-78"/>
               </a:rPr>
               <a:t>م</a:t>
@@ -23991,6 +24133,7 @@
                   <a:srgbClr val="8A6D1E"/>
                 </a:solidFill>
                 <a:latin typeface="Amiri" pitchFamily="2" charset="-78"/>
+                <a:ea typeface="Amiri" pitchFamily="2" charset="-78"/>
                 <a:cs typeface="Amiri" pitchFamily="2" charset="-78"/>
               </a:rPr>
               <a:t>نَصُّ السُّؤَالِ</a:t>
@@ -24271,6 +24414,7 @@
                   <a:srgbClr val="1B3B6F"/>
                 </a:solidFill>
                 <a:latin typeface="Amiri" pitchFamily="2" charset="-78"/>
+                <a:ea typeface="Amiri" pitchFamily="2" charset="-78"/>
                 <a:cs typeface="Amiri" pitchFamily="2" charset="-78"/>
               </a:rPr>
               <a:t>اكْتُبِي رِسَالَةً إِلَى صَدِيقَتِكِ عَنِ احْتِفَالِكِ بِالعِيدِ (٨٠–٩٠ كَلِمَةً).</a:t>
@@ -24412,6 +24556,7 @@
                   <a:srgbClr val="1B3B6F"/>
                 </a:solidFill>
                 <a:latin typeface="Amiri" pitchFamily="2" charset="-78"/>
+                <a:ea typeface="Amiri" pitchFamily="2" charset="-78"/>
                 <a:cs typeface="Amiri" pitchFamily="2" charset="-78"/>
               </a:rPr>
               <a:t>كَيْفَ اسْتَعْدَدْتِ لِلْعِيدِ؟</a:t>
@@ -24553,6 +24698,7 @@
                   <a:srgbClr val="1B3B6F"/>
                 </a:solidFill>
                 <a:latin typeface="Amiri" pitchFamily="2" charset="-78"/>
+                <a:ea typeface="Amiri" pitchFamily="2" charset="-78"/>
                 <a:cs typeface="Amiri" pitchFamily="2" charset="-78"/>
               </a:rPr>
               <a:t>مَاذَا فَعَلْتِ يَوْمَ العِيدِ؟ (بِالتَّرْتِيبِ)</a:t>
@@ -24694,6 +24840,7 @@
                   <a:srgbClr val="1B3B6F"/>
                 </a:solidFill>
                 <a:latin typeface="Amiri" pitchFamily="2" charset="-78"/>
+                <a:ea typeface="Amiri" pitchFamily="2" charset="-78"/>
                 <a:cs typeface="Amiri" pitchFamily="2" charset="-78"/>
               </a:rPr>
               <a:t>مَا الهَدِيَّةُ؟ وَمَا رَأْيُكِ فِي اليَوْمِ؟</a:t>
@@ -24835,6 +24982,7 @@
                   <a:srgbClr val="1B3B6F"/>
                 </a:solidFill>
                 <a:latin typeface="Amiri" pitchFamily="2" charset="-78"/>
+                <a:ea typeface="Amiri" pitchFamily="2" charset="-78"/>
                 <a:cs typeface="Amiri" pitchFamily="2" charset="-78"/>
               </a:rPr>
               <a:t>مَاذَا سَتَفْعَلِينَ فِي العِيدِ القَادِمِ؟ وَاسْأَلِي صَدِيقَتَكِ سُؤَالًا.</a:t>
@@ -25044,6 +25192,7 @@
                   <a:srgbClr val="D4AF37"/>
                 </a:solidFill>
                 <a:latin typeface="Amiri" pitchFamily="2" charset="-78"/>
+                <a:ea typeface="Amiri" pitchFamily="2" charset="-78"/>
                 <a:cs typeface="Amiri" pitchFamily="2" charset="-78"/>
               </a:rPr>
               <a:t>م</a:t>
@@ -25364,6 +25513,7 @@
                   <a:srgbClr val="8A6D1E"/>
                 </a:solidFill>
                 <a:latin typeface="Amiri" pitchFamily="2" charset="-78"/>
+                <a:ea typeface="Amiri" pitchFamily="2" charset="-78"/>
                 <a:cs typeface="Amiri" pitchFamily="2" charset="-78"/>
               </a:rPr>
               <a:t>قَوَالِبُ الكِتَابَةِ</a:t>
@@ -25644,6 +25794,7 @@
                   <a:srgbClr val="1B3B6F"/>
                 </a:solidFill>
                 <a:latin typeface="Amiri" pitchFamily="2" charset="-78"/>
+                <a:ea typeface="Amiri" pitchFamily="2" charset="-78"/>
                 <a:cs typeface="Amiri" pitchFamily="2" charset="-78"/>
               </a:rPr>
               <a:t>مَرْحَبًا يَا ______ ، عِيدٌ مُبَارَكٌ!</a:t>
@@ -25850,6 +26001,7 @@
                   <a:srgbClr val="1B3B6F"/>
                 </a:solidFill>
                 <a:latin typeface="Amiri" pitchFamily="2" charset="-78"/>
+                <a:ea typeface="Amiri" pitchFamily="2" charset="-78"/>
                 <a:cs typeface="Amiri" pitchFamily="2" charset="-78"/>
               </a:rPr>
               <a:t>قَبْلَ العِيدِ اشْتَرَيْتُ ______ ، وَلَبِسْتُ______ .</a:t>
@@ -26056,6 +26208,7 @@
                   <a:srgbClr val="1B3B6F"/>
                 </a:solidFill>
                 <a:latin typeface="Amiri" pitchFamily="2" charset="-78"/>
+                <a:ea typeface="Amiri" pitchFamily="2" charset="-78"/>
                 <a:cs typeface="Amiri" pitchFamily="2" charset="-78"/>
               </a:rPr>
               <a:t>أَوَّلًا ______ ، ثُمَّ ______ ، بَعْدَ ذٰلِكَ ______ .</a:t>
@@ -26262,6 +26415,7 @@
                   <a:srgbClr val="1B3B6F"/>
                 </a:solidFill>
                 <a:latin typeface="Amiri" pitchFamily="2" charset="-78"/>
+                <a:ea typeface="Amiri" pitchFamily="2" charset="-78"/>
                 <a:cs typeface="Amiri" pitchFamily="2" charset="-78"/>
               </a:rPr>
               <a:t>أَعْطَانِي ______ . كَانَ اليَوْمُ ______ لِأَنَّ ______ .</a:t>
@@ -26468,6 +26622,7 @@
                   <a:srgbClr val="1B3B6F"/>
                 </a:solidFill>
                 <a:latin typeface="Amiri" pitchFamily="2" charset="-78"/>
+                <a:ea typeface="Amiri" pitchFamily="2" charset="-78"/>
                 <a:cs typeface="Amiri" pitchFamily="2" charset="-78"/>
               </a:rPr>
               <a:t>فِي العِيدِ القَادِمِ سَأَ______ .</a:t>
@@ -26674,6 +26829,7 @@
                   <a:srgbClr val="1B3B6F"/>
                 </a:solidFill>
                 <a:latin typeface="Amiri" pitchFamily="2" charset="-78"/>
+                <a:ea typeface="Amiri" pitchFamily="2" charset="-78"/>
                 <a:cs typeface="Amiri" pitchFamily="2" charset="-78"/>
               </a:rPr>
               <a:t>وَأَنْتِ، ______ ؟ مَعَ السَّلَامَةِ.</a:t>
@@ -26913,13 +27069,9 @@
     <a:fontScheme name="Office">
       <a:majorFont>
         <a:latin typeface="Calibri Light" panose="020F0302020204030204"/>
-        <a:ea typeface=""/>
-        <a:cs typeface=""/>
-        <a:font script="Jpan" typeface="游ゴシック Light"/>
-        <a:font script="Hang" typeface="맑은 고딕"/>
-        <a:font script="Hans" typeface="等线 Light"/>
-        <a:font script="Hant" typeface="新細明體"/>
-        <a:font script="Arab" typeface="Times New Roman"/>
+        <a:ea typeface="Amiri" pitchFamily="2" charset="-78"/>
+        <a:cs typeface="Amiri" pitchFamily="2" charset="-78"/>
+        <a:font script="Arab" typeface="Amiri"/>
         <a:font script="Hebr" typeface="Times New Roman"/>
         <a:font script="Thai" typeface="Angsana New"/>
         <a:font script="Ethi" typeface="Nyala"/>
@@ -26965,13 +27117,9 @@
       </a:majorFont>
       <a:minorFont>
         <a:latin typeface="Calibri" panose="020F0502020204030204"/>
-        <a:ea typeface=""/>
-        <a:cs typeface=""/>
-        <a:font script="Jpan" typeface="游ゴシック"/>
-        <a:font script="Hang" typeface="맑은 고딕"/>
-        <a:font script="Hans" typeface="等线"/>
-        <a:font script="Hant" typeface="新細明體"/>
-        <a:font script="Arab" typeface="Arial"/>
+        <a:ea typeface="Amiri" pitchFamily="2" charset="-78"/>
+        <a:cs typeface="Amiri" pitchFamily="2" charset="-78"/>
+        <a:font script="Arab" typeface="Amiri"/>
         <a:font script="Hebr" typeface="Arial"/>
         <a:font script="Thai" typeface="Cordia New"/>
         <a:font script="Ethi" typeface="Nyala"/>

--- a/Topic_E/Exam_Practice/TE-L06_Writing_Workshop_Faith_Celebrations_and_Special_Occasions.pptx
+++ b/Topic_E/Exam_Practice/TE-L06_Writing_Workshop_Faith_Celebrations_and_Special_Occasions.pptx
@@ -3852,7 +3852,7 @@
                 <a:solidFill>
                   <a:srgbClr val="FFFFFF"/>
                 </a:solidFill>
-                <a:latin typeface="Calibri" pitchFamily="34" charset="0"/>
+                <a:latin typeface="Amiri" pitchFamily="2" charset="-78"/>
                 <a:ea typeface="Amiri" pitchFamily="2" charset="-78"/>
                 <a:cs typeface="Amiri" pitchFamily="2" charset="-78"/>
               </a:rPr>
@@ -3918,7 +3918,7 @@
                 <a:solidFill>
                   <a:srgbClr val="FFFFFF"/>
                 </a:solidFill>
-                <a:latin typeface="Calibri" pitchFamily="34" charset="0"/>
+                <a:latin typeface="Amiri" pitchFamily="2" charset="-78"/>
                 <a:ea typeface="Amiri" pitchFamily="2" charset="-78"/>
                 <a:cs typeface="Amiri" pitchFamily="2" charset="-78"/>
               </a:rPr>
@@ -3984,7 +3984,7 @@
                 <a:solidFill>
                   <a:srgbClr val="FFFFFF"/>
                 </a:solidFill>
-                <a:latin typeface="Calibri" pitchFamily="34" charset="0"/>
+                <a:latin typeface="Amiri" pitchFamily="2" charset="-78"/>
                 <a:ea typeface="Amiri" pitchFamily="2" charset="-78"/>
                 <a:cs typeface="Amiri" pitchFamily="2" charset="-78"/>
               </a:rPr>
@@ -4050,7 +4050,7 @@
                 <a:solidFill>
                   <a:srgbClr val="FFFFFF"/>
                 </a:solidFill>
-                <a:latin typeface="Calibri" pitchFamily="34" charset="0"/>
+                <a:latin typeface="Amiri" pitchFamily="2" charset="-78"/>
                 <a:ea typeface="Amiri" pitchFamily="2" charset="-78"/>
                 <a:cs typeface="Amiri" pitchFamily="2" charset="-78"/>
               </a:rPr>
@@ -4848,7 +4848,7 @@
                 <a:solidFill>
                   <a:srgbClr val="FFFFFF"/>
                 </a:solidFill>
-                <a:latin typeface="Calibri" pitchFamily="34" charset="0"/>
+                <a:latin typeface="Amiri" pitchFamily="2" charset="-78"/>
                 <a:ea typeface="Amiri" pitchFamily="2" charset="-78"/>
                 <a:cs typeface="Amiri" pitchFamily="2" charset="-78"/>
               </a:rPr>
@@ -4914,7 +4914,7 @@
                 <a:solidFill>
                   <a:srgbClr val="FFFFFF"/>
                 </a:solidFill>
-                <a:latin typeface="Calibri" pitchFamily="34" charset="0"/>
+                <a:latin typeface="Amiri" pitchFamily="2" charset="-78"/>
                 <a:ea typeface="Amiri" pitchFamily="2" charset="-78"/>
                 <a:cs typeface="Amiri" pitchFamily="2" charset="-78"/>
               </a:rPr>
@@ -4980,7 +4980,7 @@
                 <a:solidFill>
                   <a:srgbClr val="FFFFFF"/>
                 </a:solidFill>
-                <a:latin typeface="Calibri" pitchFamily="34" charset="0"/>
+                <a:latin typeface="Amiri" pitchFamily="2" charset="-78"/>
                 <a:ea typeface="Amiri" pitchFamily="2" charset="-78"/>
                 <a:cs typeface="Amiri" pitchFamily="2" charset="-78"/>
               </a:rPr>
@@ -5046,7 +5046,7 @@
                 <a:solidFill>
                   <a:srgbClr val="FFFFFF"/>
                 </a:solidFill>
-                <a:latin typeface="Calibri" pitchFamily="34" charset="0"/>
+                <a:latin typeface="Amiri" pitchFamily="2" charset="-78"/>
                 <a:ea typeface="Amiri" pitchFamily="2" charset="-78"/>
                 <a:cs typeface="Amiri" pitchFamily="2" charset="-78"/>
               </a:rPr>
@@ -8603,7 +8603,7 @@
                 <a:solidFill>
                   <a:srgbClr val="FFFFFF"/>
                 </a:solidFill>
-                <a:latin typeface="Calibri" pitchFamily="34" charset="0"/>
+                <a:latin typeface="Amiri" pitchFamily="2" charset="-78"/>
                 <a:ea typeface="Amiri" pitchFamily="2" charset="-78"/>
                 <a:cs typeface="Amiri" pitchFamily="2" charset="-78"/>
               </a:rPr>
@@ -8669,7 +8669,7 @@
                 <a:solidFill>
                   <a:srgbClr val="FFFFFF"/>
                 </a:solidFill>
-                <a:latin typeface="Calibri" pitchFamily="34" charset="0"/>
+                <a:latin typeface="Amiri" pitchFamily="2" charset="-78"/>
                 <a:ea typeface="Amiri" pitchFamily="2" charset="-78"/>
                 <a:cs typeface="Amiri" pitchFamily="2" charset="-78"/>
               </a:rPr>
@@ -8735,7 +8735,7 @@
                 <a:solidFill>
                   <a:srgbClr val="FFFFFF"/>
                 </a:solidFill>
-                <a:latin typeface="Calibri" pitchFamily="34" charset="0"/>
+                <a:latin typeface="Amiri" pitchFamily="2" charset="-78"/>
                 <a:ea typeface="Amiri" pitchFamily="2" charset="-78"/>
                 <a:cs typeface="Amiri" pitchFamily="2" charset="-78"/>
               </a:rPr>
@@ -8801,7 +8801,7 @@
                 <a:solidFill>
                   <a:srgbClr val="FFFFFF"/>
                 </a:solidFill>
-                <a:latin typeface="Calibri" pitchFamily="34" charset="0"/>
+                <a:latin typeface="Amiri" pitchFamily="2" charset="-78"/>
                 <a:ea typeface="Amiri" pitchFamily="2" charset="-78"/>
                 <a:cs typeface="Amiri" pitchFamily="2" charset="-78"/>
               </a:rPr>
@@ -9588,7 +9588,7 @@
                 <a:solidFill>
                   <a:srgbClr val="FFFFFF"/>
                 </a:solidFill>
-                <a:latin typeface="Calibri" pitchFamily="34" charset="0"/>
+                <a:latin typeface="Amiri" pitchFamily="2" charset="-78"/>
                 <a:ea typeface="Amiri" pitchFamily="2" charset="-78"/>
                 <a:cs typeface="Amiri" pitchFamily="2" charset="-78"/>
               </a:rPr>
@@ -9654,7 +9654,7 @@
                 <a:solidFill>
                   <a:srgbClr val="FFFFFF"/>
                 </a:solidFill>
-                <a:latin typeface="Calibri" pitchFamily="34" charset="0"/>
+                <a:latin typeface="Amiri" pitchFamily="2" charset="-78"/>
                 <a:ea typeface="Amiri" pitchFamily="2" charset="-78"/>
                 <a:cs typeface="Amiri" pitchFamily="2" charset="-78"/>
               </a:rPr>
@@ -9720,7 +9720,7 @@
                 <a:solidFill>
                   <a:srgbClr val="FFFFFF"/>
                 </a:solidFill>
-                <a:latin typeface="Calibri" pitchFamily="34" charset="0"/>
+                <a:latin typeface="Amiri" pitchFamily="2" charset="-78"/>
                 <a:ea typeface="Amiri" pitchFamily="2" charset="-78"/>
                 <a:cs typeface="Amiri" pitchFamily="2" charset="-78"/>
               </a:rPr>
@@ -9786,7 +9786,7 @@
                 <a:solidFill>
                   <a:srgbClr val="FFFFFF"/>
                 </a:solidFill>
-                <a:latin typeface="Calibri" pitchFamily="34" charset="0"/>
+                <a:latin typeface="Amiri" pitchFamily="2" charset="-78"/>
                 <a:ea typeface="Amiri" pitchFamily="2" charset="-78"/>
                 <a:cs typeface="Amiri" pitchFamily="2" charset="-78"/>
               </a:rPr>
@@ -10573,7 +10573,7 @@
                 <a:solidFill>
                   <a:srgbClr val="FFFFFF"/>
                 </a:solidFill>
-                <a:latin typeface="Calibri" pitchFamily="34" charset="0"/>
+                <a:latin typeface="Amiri" pitchFamily="2" charset="-78"/>
                 <a:ea typeface="Amiri" pitchFamily="2" charset="-78"/>
                 <a:cs typeface="Amiri" pitchFamily="2" charset="-78"/>
               </a:rPr>
@@ -10639,7 +10639,7 @@
                 <a:solidFill>
                   <a:srgbClr val="FFFFFF"/>
                 </a:solidFill>
-                <a:latin typeface="Calibri" pitchFamily="34" charset="0"/>
+                <a:latin typeface="Amiri" pitchFamily="2" charset="-78"/>
                 <a:ea typeface="Amiri" pitchFamily="2" charset="-78"/>
                 <a:cs typeface="Amiri" pitchFamily="2" charset="-78"/>
               </a:rPr>
@@ -10705,7 +10705,7 @@
                 <a:solidFill>
                   <a:srgbClr val="FFFFFF"/>
                 </a:solidFill>
-                <a:latin typeface="Calibri" pitchFamily="34" charset="0"/>
+                <a:latin typeface="Amiri" pitchFamily="2" charset="-78"/>
                 <a:ea typeface="Amiri" pitchFamily="2" charset="-78"/>
                 <a:cs typeface="Amiri" pitchFamily="2" charset="-78"/>
               </a:rPr>
@@ -10771,7 +10771,7 @@
                 <a:solidFill>
                   <a:srgbClr val="FFFFFF"/>
                 </a:solidFill>
-                <a:latin typeface="Calibri" pitchFamily="34" charset="0"/>
+                <a:latin typeface="Amiri" pitchFamily="2" charset="-78"/>
                 <a:ea typeface="Amiri" pitchFamily="2" charset="-78"/>
                 <a:cs typeface="Amiri" pitchFamily="2" charset="-78"/>
               </a:rPr>
